--- a/Day1_Repository_Foundation_First_CUDA_Feature.pptx
+++ b/Day1_Repository_Foundation_First_CUDA_Feature.pptx
@@ -7047,7 +7047,7 @@
 </file>
 
 <file path=ppt/slides/slide2.xml><?xml version="1.0" encoding="utf-8"?>
-<p:sld xmlns:a="http://schemas.openxmlformats.org/drawingml/2006/main" xmlns:p="http://schemas.openxmlformats.org/presentationml/2006/main" xmlns:r="http://schemas.openxmlformats.org/officeDocument/2006/relationships">
+<p:sld xmlns:a="http://schemas.openxmlformats.org/drawingml/2006/main" xmlns:p="http://schemas.openxmlformats.org/presentationml/2006/main">
   <p:cSld>
     <p:bg>
       <p:bgPr>
@@ -7259,30 +7259,338 @@
           </a:p>
         </p:txBody>
       </p:sp>
-      <p:pic>
-        <p:nvPicPr>
-          <p:cNvPr id="7" name="Picture 6" descr="before_after.png"/>
-          <p:cNvPicPr>
-            <a:picLocks noChangeAspect="1"/>
-          </p:cNvPicPr>
-          <p:nvPr/>
-        </p:nvPicPr>
-        <p:blipFill>
-          <a:blip r:embed="rId2"/>
-          <a:stretch>
-            <a:fillRect/>
-          </a:stretch>
-        </p:blipFill>
-        <p:spPr>
-          <a:xfrm>
-            <a:off x="594360" y="2101595"/>
-            <a:ext cx="6766560" cy="3157728"/>
-          </a:xfrm>
-          <a:prstGeom prst="rect">
-            <a:avLst/>
-          </a:prstGeom>
-        </p:spPr>
-      </p:pic>
+      <p:sp>
+        <p:nvSpPr>
+          <p:cNvPr id="10" name="Editable Old Flow Square"/>
+          <p:cNvSpPr/>
+          <p:nvPr/>
+        </p:nvSpPr>
+        <p:spPr>
+          <a:xfrm>
+            <a:off x="877824" y="2249424"/>
+            <a:ext cx="2487168" cy="2432304"/>
+          </a:xfrm>
+          <a:prstGeom prst="rect">
+            <a:avLst/>
+          </a:prstGeom>
+          <a:solidFill>
+            <a:srgbClr val="FDEAEA"/>
+          </a:solidFill>
+          <a:ln w="12700">
+            <a:solidFill>
+              <a:srgbClr val="D83A34"/>
+            </a:solidFill>
+          </a:ln>
+        </p:spPr>
+      </p:sp>
+      <p:sp>
+        <p:nvSpPr>
+          <p:cNvPr id="11" name="Editable New Flow Square"/>
+          <p:cNvSpPr/>
+          <p:nvPr/>
+        </p:nvSpPr>
+        <p:spPr>
+          <a:xfrm>
+            <a:off x="3941064" y="2249424"/>
+            <a:ext cx="2487168" cy="2432304"/>
+          </a:xfrm>
+          <a:prstGeom prst="rect">
+            <a:avLst/>
+          </a:prstGeom>
+          <a:solidFill>
+            <a:srgbClr val="EDF9E9"/>
+          </a:solidFill>
+          <a:ln w="12700">
+            <a:solidFill>
+              <a:srgbClr val="62B000"/>
+            </a:solidFill>
+          </a:ln>
+        </p:spPr>
+      </p:sp>
+      <p:sp>
+        <p:nvSpPr>
+          <p:cNvPr id="12" name="Editable Flow Arrow"/>
+          <p:cNvSpPr/>
+          <p:nvPr/>
+        </p:nvSpPr>
+        <p:spPr>
+          <a:xfrm>
+            <a:off x="3547872" y="3401568"/>
+            <a:ext cx="320040" cy="164592"/>
+          </a:xfrm>
+          <a:prstGeom prst="rightArrow">
+            <a:avLst/>
+          </a:prstGeom>
+          <a:solidFill>
+            <a:srgbClr val="63AF00"/>
+          </a:solidFill>
+          <a:ln w="6350">
+            <a:solidFill>
+              <a:srgbClr val="63AF00"/>
+            </a:solidFill>
+          </a:ln>
+        </p:spPr>
+      </p:sp>
+      <p:sp>
+        <p:nvSpPr>
+          <p:cNvPr id="13" name="Old Flow Label"/>
+          <p:cNvSpPr txBox="1"/>
+          <p:nvPr/>
+        </p:nvSpPr>
+        <p:spPr>
+          <a:xfrm>
+            <a:off x="1188720" y="2496312"/>
+            <a:ext cx="1865376" cy="310896"/>
+          </a:xfrm>
+          <a:prstGeom prst="rect">
+            <a:avLst/>
+          </a:prstGeom>
+          <a:noFill/>
+        </p:spPr>
+        <p:txBody>
+          <a:bodyPr wrap="square" anchor="t" lIns="0" tIns="0" rIns="0" bIns="0">
+            <a:normAutofit/>
+          </a:bodyPr>
+          <a:lstStyle/>
+          <a:p>
+            <a:pPr algn="l"/>
+            <a:r>
+              <a:rPr sz="1500" b="1">
+                <a:solidFill>
+                  <a:srgbClr val="1A1A1A"/>
+                </a:solidFill>
+                <a:latin typeface="Aptos"/>
+              </a:rPr>
+              <a:t>Old flow</a:t>
+            </a:r>
+          </a:p>
+        </p:txBody>
+      </p:sp>
+      <p:sp>
+        <p:nvSpPr>
+          <p:cNvPr id="14" name="New Flow Label"/>
+          <p:cNvSpPr txBox="1"/>
+          <p:nvPr/>
+        </p:nvSpPr>
+        <p:spPr>
+          <a:xfrm>
+            <a:off x="4251960" y="2496312"/>
+            <a:ext cx="1865376" cy="310896"/>
+          </a:xfrm>
+          <a:prstGeom prst="rect">
+            <a:avLst/>
+          </a:prstGeom>
+          <a:noFill/>
+        </p:spPr>
+        <p:txBody>
+          <a:bodyPr wrap="square" anchor="t" lIns="0" tIns="0" rIns="0" bIns="0">
+            <a:normAutofit/>
+          </a:bodyPr>
+          <a:lstStyle/>
+          <a:p>
+            <a:pPr algn="l"/>
+            <a:r>
+              <a:rPr sz="1500" b="1">
+                <a:solidFill>
+                  <a:srgbClr val="1A1A1A"/>
+                </a:solidFill>
+                <a:latin typeface="Aptos"/>
+              </a:rPr>
+              <a:t>New flow</a:t>
+            </a:r>
+          </a:p>
+        </p:txBody>
+      </p:sp>
+      <p:sp>
+        <p:nvSpPr>
+          <p:cNvPr id="15" name="Old Flow Bullets"/>
+          <p:cNvSpPr txBox="1"/>
+          <p:nvPr/>
+        </p:nvSpPr>
+        <p:spPr>
+          <a:xfrm>
+            <a:off x="1261872" y="2962656"/>
+            <a:ext cx="1847088" cy="1572768"/>
+          </a:xfrm>
+          <a:prstGeom prst="rect">
+            <a:avLst/>
+          </a:prstGeom>
+          <a:noFill/>
+        </p:spPr>
+        <p:txBody>
+          <a:bodyPr wrap="square" anchor="t" lIns="0" tIns="0" rIns="0" bIns="0">
+            <a:normAutofit/>
+          </a:bodyPr>
+          <a:lstStyle/>
+          <a:p>
+            <a:pPr algn="l" marL="171450" indent="-114300">
+              <a:spcAft>
+                <a:spcPts val="600"/>
+              </a:spcAft>
+              <a:buFont typeface="Aptos"/>
+              <a:buChar char="•"/>
+            </a:pPr>
+            <a:r>
+              <a:rPr sz="1000">
+                <a:solidFill>
+                  <a:srgbClr val="303030"/>
+                </a:solidFill>
+                <a:latin typeface="Aptos"/>
+              </a:rPr>
+              <a:t>Visual Studio project</a:t>
+            </a:r>
+          </a:p>
+          <a:p>
+            <a:pPr algn="l" marL="171450" indent="-114300">
+              <a:spcAft>
+                <a:spcPts val="600"/>
+              </a:spcAft>
+              <a:buFont typeface="Aptos"/>
+              <a:buChar char="•"/>
+            </a:pPr>
+            <a:r>
+              <a:rPr sz="1000">
+                <a:solidFill>
+                  <a:srgbClr val="303030"/>
+                </a:solidFill>
+                <a:latin typeface="Aptos"/>
+              </a:rPr>
+              <a:t>manual CUDA SDK install</a:t>
+            </a:r>
+          </a:p>
+          <a:p>
+            <a:pPr algn="l" marL="171450" indent="-114300">
+              <a:spcAft>
+                <a:spcPts val="600"/>
+              </a:spcAft>
+              <a:buFont typeface="Aptos"/>
+              <a:buChar char="•"/>
+            </a:pPr>
+            <a:r>
+              <a:rPr sz="1000">
+                <a:solidFill>
+                  <a:srgbClr val="303030"/>
+                </a:solidFill>
+                <a:latin typeface="Aptos"/>
+              </a:rPr>
+              <a:t>local machine settings</a:t>
+            </a:r>
+          </a:p>
+          <a:p>
+            <a:pPr algn="l" marL="171450" indent="-114300">
+              <a:spcAft>
+                <a:spcPts val="600"/>
+              </a:spcAft>
+              <a:buFont typeface="Aptos"/>
+              <a:buChar char="•"/>
+            </a:pPr>
+            <a:r>
+              <a:rPr sz="1000">
+                <a:solidFill>
+                  <a:srgbClr val="303030"/>
+                </a:solidFill>
+                <a:latin typeface="Aptos"/>
+              </a:rPr>
+              <a:t>debugger-first flow</a:t>
+            </a:r>
+          </a:p>
+        </p:txBody>
+      </p:sp>
+      <p:sp>
+        <p:nvSpPr>
+          <p:cNvPr id="16" name="New Flow Bullets"/>
+          <p:cNvSpPr txBox="1"/>
+          <p:nvPr/>
+        </p:nvSpPr>
+        <p:spPr>
+          <a:xfrm>
+            <a:off x="4325112" y="2962656"/>
+            <a:ext cx="1847088" cy="1572768"/>
+          </a:xfrm>
+          <a:prstGeom prst="rect">
+            <a:avLst/>
+          </a:prstGeom>
+          <a:noFill/>
+        </p:spPr>
+        <p:txBody>
+          <a:bodyPr wrap="square" anchor="t" lIns="0" tIns="0" rIns="0" bIns="0">
+            <a:normAutofit/>
+          </a:bodyPr>
+          <a:lstStyle/>
+          <a:p>
+            <a:pPr algn="l" marL="171450" indent="-114300">
+              <a:spcAft>
+                <a:spcPts val="600"/>
+              </a:spcAft>
+              <a:buFont typeface="Aptos"/>
+              <a:buChar char="•"/>
+            </a:pPr>
+            <a:r>
+              <a:rPr sz="1000">
+                <a:solidFill>
+                  <a:srgbClr val="303030"/>
+                </a:solidFill>
+                <a:latin typeface="Aptos"/>
+              </a:rPr>
+              <a:t>Bazel target graph</a:t>
+            </a:r>
+          </a:p>
+          <a:p>
+            <a:pPr algn="l" marL="171450" indent="-114300">
+              <a:spcAft>
+                <a:spcPts val="600"/>
+              </a:spcAft>
+              <a:buFont typeface="Aptos"/>
+              <a:buChar char="•"/>
+            </a:pPr>
+            <a:r>
+              <a:rPr sz="1000">
+                <a:solidFill>
+                  <a:srgbClr val="303030"/>
+                </a:solidFill>
+                <a:latin typeface="Aptos"/>
+              </a:rPr>
+              <a:t>hermetic Clang/CUDA</a:t>
+            </a:r>
+          </a:p>
+          <a:p>
+            <a:pPr algn="l" marL="171450" indent="-114300">
+              <a:spcAft>
+                <a:spcPts val="600"/>
+              </a:spcAft>
+              <a:buFont typeface="Aptos"/>
+              <a:buChar char="•"/>
+            </a:pPr>
+            <a:r>
+              <a:rPr sz="1000">
+                <a:solidFill>
+                  <a:srgbClr val="303030"/>
+                </a:solidFill>
+                <a:latin typeface="Aptos"/>
+              </a:rPr>
+              <a:t>tests + benchmarks</a:t>
+            </a:r>
+          </a:p>
+          <a:p>
+            <a:pPr algn="l" marL="171450" indent="-114300">
+              <a:spcAft>
+                <a:spcPts val="600"/>
+              </a:spcAft>
+              <a:buFont typeface="Aptos"/>
+              <a:buChar char="•"/>
+            </a:pPr>
+            <a:r>
+              <a:rPr sz="1000">
+                <a:solidFill>
+                  <a:srgbClr val="303030"/>
+                </a:solidFill>
+                <a:latin typeface="Aptos"/>
+              </a:rPr>
+              <a:t>artifact packaging</a:t>
+            </a:r>
+          </a:p>
+        </p:txBody>
+      </p:sp>
       <p:sp>
         <p:nvSpPr>
           <p:cNvPr id="8" name="TextBox 7"/>
@@ -13183,7 +13491,7 @@
 </file>
 
 <file path=ppt/slides/slide34.xml><?xml version="1.0" encoding="utf-8"?>
-<p:sld xmlns:a="http://schemas.openxmlformats.org/drawingml/2006/main" xmlns:p="http://schemas.openxmlformats.org/presentationml/2006/main" xmlns:r="http://schemas.openxmlformats.org/officeDocument/2006/relationships">
+<p:sld xmlns:a="http://schemas.openxmlformats.org/drawingml/2006/main" xmlns:p="http://schemas.openxmlformats.org/presentationml/2006/main">
   <p:cSld>
     <p:bg>
       <p:bgPr>
@@ -13395,30 +13703,344 @@
           </a:p>
         </p:txBody>
       </p:sp>
-      <p:pic>
-        <p:nvPicPr>
-          <p:cNvPr id="7" name="Picture 6" descr="target_graph.png"/>
-          <p:cNvPicPr>
-            <a:picLocks noChangeAspect="1"/>
-          </p:cNvPicPr>
-          <p:nvPr/>
-        </p:nvPicPr>
-        <p:blipFill>
-          <a:blip r:embed="rId2"/>
-          <a:stretch>
-            <a:fillRect/>
-          </a:stretch>
-        </p:blipFill>
-        <p:spPr>
-          <a:xfrm>
-            <a:off x="594360" y="2101595"/>
-            <a:ext cx="6766560" cy="3157728"/>
-          </a:xfrm>
-          <a:prstGeom prst="rect">
-            <a:avLst/>
-          </a:prstGeom>
-        </p:spPr>
-      </p:pic>
+      <p:sp>
+        <p:nvSpPr>
+          <p:cNvPr id="10" name="Target Graph Diagram Title"/>
+          <p:cNvSpPr txBox="1"/>
+          <p:nvPr/>
+        </p:nvSpPr>
+        <p:spPr>
+          <a:xfrm>
+            <a:off x="786384" y="2240280"/>
+            <a:ext cx="6309360" cy="320040"/>
+          </a:xfrm>
+          <a:prstGeom prst="rect">
+            <a:avLst/>
+          </a:prstGeom>
+          <a:noFill/>
+          <a:ln/>
+        </p:spPr>
+        <p:txBody>
+          <a:bodyPr wrap="square" anchor="t" lIns="0" tIns="0" rIns="0" bIns="0">
+            <a:normAutofit/>
+          </a:bodyPr>
+          <a:lstStyle/>
+          <a:p>
+            <a:pPr algn="l"/>
+            <a:r>
+              <a:rPr sz="1200" b="1">
+                <a:solidFill>
+                  <a:srgbClr val="121B2A"/>
+                </a:solidFill>
+                <a:latin typeface="Aptos"/>
+              </a:rPr>
+              <a:t>Bazel target graph mirrors project architecture</a:t>
+            </a:r>
+          </a:p>
+        </p:txBody>
+      </p:sp>
+      <p:sp>
+        <p:nvSpPr>
+          <p:cNvPr id="11" name="Benchmark Target Node"/>
+          <p:cNvSpPr/>
+          <p:nvPr/>
+        </p:nvSpPr>
+        <p:spPr>
+          <a:xfrm>
+            <a:off x="960120" y="3200400"/>
+            <a:ext cx="1325880" cy="512064"/>
+          </a:xfrm>
+          <a:prstGeom prst="roundRect">
+            <a:avLst/>
+          </a:prstGeom>
+          <a:solidFill>
+            <a:srgbClr val="E6F6F8"/>
+          </a:solidFill>
+          <a:ln w="10160">
+            <a:solidFill>
+              <a:srgbClr val="9BA9B8"/>
+            </a:solidFill>
+          </a:ln>
+        </p:spPr>
+        <p:txBody>
+          <a:bodyPr wrap="square" anchor="ctr" lIns="91440" tIns="36576" rIns="91440" bIns="36576">
+            <a:normAutofit/>
+          </a:bodyPr>
+          <a:lstStyle/>
+          <a:p>
+            <a:pPr algn="ctr"/>
+            <a:r>
+              <a:rPr sz="950">
+                <a:solidFill>
+                  <a:srgbClr val="1C2430"/>
+                </a:solidFill>
+                <a:latin typeface="Aptos"/>
+              </a:rPr>
+              <a:t>benchmark</a:t>
+            </a:r>
+          </a:p>
+        </p:txBody>
+      </p:sp>
+      <p:sp>
+        <p:nvSpPr>
+          <p:cNvPr id="12" name="Vector CPU Target Node"/>
+          <p:cNvSpPr/>
+          <p:nvPr/>
+        </p:nvSpPr>
+        <p:spPr>
+          <a:xfrm>
+            <a:off x="2606040" y="2816352"/>
+            <a:ext cx="1417320" cy="512064"/>
+          </a:xfrm>
+          <a:prstGeom prst="roundRect">
+            <a:avLst/>
+          </a:prstGeom>
+          <a:solidFill>
+            <a:srgbClr val="E4EFFC"/>
+          </a:solidFill>
+          <a:ln w="10160">
+            <a:solidFill>
+              <a:srgbClr val="9BA9B8"/>
+            </a:solidFill>
+          </a:ln>
+        </p:spPr>
+        <p:txBody>
+          <a:bodyPr wrap="square" anchor="ctr" lIns="91440" tIns="36576" rIns="91440" bIns="36576">
+            <a:normAutofit/>
+          </a:bodyPr>
+          <a:lstStyle/>
+          <a:p>
+            <a:pPr algn="ctr"/>
+            <a:r>
+              <a:rPr sz="950">
+                <a:solidFill>
+                  <a:srgbClr val="1C2430"/>
+                </a:solidFill>
+                <a:latin typeface="Aptos"/>
+              </a:rPr>
+              <a:t>vector_cpu</a:t>
+            </a:r>
+          </a:p>
+        </p:txBody>
+      </p:sp>
+      <p:sp>
+        <p:nvSpPr>
+          <p:cNvPr id="13" name="Vector Add Target Node"/>
+          <p:cNvSpPr/>
+          <p:nvPr/>
+        </p:nvSpPr>
+        <p:spPr>
+          <a:xfrm>
+            <a:off x="2606040" y="3730752"/>
+            <a:ext cx="1417320" cy="512064"/>
+          </a:xfrm>
+          <a:prstGeom prst="roundRect">
+            <a:avLst/>
+          </a:prstGeom>
+          <a:solidFill>
+            <a:srgbClr val="EAF8E7"/>
+          </a:solidFill>
+          <a:ln w="10160">
+            <a:solidFill>
+              <a:srgbClr val="9BA9B8"/>
+            </a:solidFill>
+          </a:ln>
+        </p:spPr>
+        <p:txBody>
+          <a:bodyPr wrap="square" anchor="ctr" lIns="91440" tIns="36576" rIns="91440" bIns="36576">
+            <a:normAutofit/>
+          </a:bodyPr>
+          <a:lstStyle/>
+          <a:p>
+            <a:pPr algn="ctr"/>
+            <a:r>
+              <a:rPr sz="950">
+                <a:solidFill>
+                  <a:srgbClr val="1C2430"/>
+                </a:solidFill>
+                <a:latin typeface="Aptos"/>
+              </a:rPr>
+              <a:t>vector_add</a:t>
+            </a:r>
+          </a:p>
+        </p:txBody>
+      </p:sp>
+      <p:sp>
+        <p:nvSpPr>
+          <p:cNvPr id="14" name="Device Lib Target Node"/>
+          <p:cNvSpPr/>
+          <p:nvPr/>
+        </p:nvSpPr>
+        <p:spPr>
+          <a:xfrm>
+            <a:off x="4343400" y="3730752"/>
+            <a:ext cx="1325880" cy="512064"/>
+          </a:xfrm>
+          <a:prstGeom prst="roundRect">
+            <a:avLst/>
+          </a:prstGeom>
+          <a:solidFill>
+            <a:srgbClr val="FFF4DE"/>
+          </a:solidFill>
+          <a:ln w="10160">
+            <a:solidFill>
+              <a:srgbClr val="9BA9B8"/>
+            </a:solidFill>
+          </a:ln>
+        </p:spPr>
+        <p:txBody>
+          <a:bodyPr wrap="square" anchor="ctr" lIns="91440" tIns="36576" rIns="91440" bIns="36576">
+            <a:normAutofit/>
+          </a:bodyPr>
+          <a:lstStyle/>
+          <a:p>
+            <a:pPr algn="ctr"/>
+            <a:r>
+              <a:rPr sz="950">
+                <a:solidFill>
+                  <a:srgbClr val="1C2430"/>
+                </a:solidFill>
+                <a:latin typeface="Aptos"/>
+              </a:rPr>
+              <a:t>device_lib</a:t>
+            </a:r>
+          </a:p>
+        </p:txBody>
+      </p:sp>
+      <p:sp>
+        <p:nvSpPr>
+          <p:cNvPr id="15" name="Runtime Target Node"/>
+          <p:cNvSpPr/>
+          <p:nvPr/>
+        </p:nvSpPr>
+        <p:spPr>
+          <a:xfrm>
+            <a:off x="5943600" y="3730752"/>
+            <a:ext cx="1234440" cy="512064"/>
+          </a:xfrm>
+          <a:prstGeom prst="roundRect">
+            <a:avLst/>
+          </a:prstGeom>
+          <a:solidFill>
+            <a:srgbClr val="EAE5FF"/>
+          </a:solidFill>
+          <a:ln w="10160">
+            <a:solidFill>
+              <a:srgbClr val="9BA9B8"/>
+            </a:solidFill>
+          </a:ln>
+        </p:spPr>
+        <p:txBody>
+          <a:bodyPr wrap="square" anchor="ctr" lIns="91440" tIns="36576" rIns="91440" bIns="36576">
+            <a:normAutofit/>
+          </a:bodyPr>
+          <a:lstStyle/>
+          <a:p>
+            <a:pPr algn="ctr"/>
+            <a:r>
+              <a:rPr sz="950">
+                <a:solidFill>
+                  <a:srgbClr val="1C2430"/>
+                </a:solidFill>
+                <a:latin typeface="Aptos"/>
+              </a:rPr>
+              <a:t>runtime</a:t>
+            </a:r>
+          </a:p>
+        </p:txBody>
+      </p:sp>
+      <p:sp>
+        <p:nvSpPr>
+          <p:cNvPr id="16" name="Benchmark To Vector CPU Connector"/>
+          <p:cNvSpPr/>
+          <p:nvPr/>
+        </p:nvSpPr>
+        <p:spPr>
+          <a:xfrm flipV="1">
+            <a:off x="2286000" y="3072384"/>
+            <a:ext cx="320040" cy="384048"/>
+          </a:xfrm>
+          <a:prstGeom prst="line">
+            <a:avLst/>
+          </a:prstGeom>
+          <a:noFill/>
+          <a:ln w="22860" cap="round">
+            <a:solidFill>
+              <a:srgbClr val="65B000"/>
+            </a:solidFill>
+            <a:tailEnd type="triangle" w="med" len="med"/>
+          </a:ln>
+        </p:spPr>
+      </p:sp>
+      <p:sp>
+        <p:nvSpPr>
+          <p:cNvPr id="17" name="Benchmark To Vector Add Connector"/>
+          <p:cNvSpPr/>
+          <p:nvPr/>
+        </p:nvSpPr>
+        <p:spPr>
+          <a:xfrm>
+            <a:off x="2286000" y="3456432"/>
+            <a:ext cx="320040" cy="530352"/>
+          </a:xfrm>
+          <a:prstGeom prst="line">
+            <a:avLst/>
+          </a:prstGeom>
+          <a:noFill/>
+          <a:ln w="22860" cap="round">
+            <a:solidFill>
+              <a:srgbClr val="65B000"/>
+            </a:solidFill>
+            <a:tailEnd type="triangle" w="med" len="med"/>
+          </a:ln>
+        </p:spPr>
+      </p:sp>
+      <p:sp>
+        <p:nvSpPr>
+          <p:cNvPr id="18" name="Vector Add To Device Lib Connector"/>
+          <p:cNvSpPr/>
+          <p:nvPr/>
+        </p:nvSpPr>
+        <p:spPr>
+          <a:xfrm>
+            <a:off x="4023360" y="3986784"/>
+            <a:ext cx="320040" cy="0"/>
+          </a:xfrm>
+          <a:prstGeom prst="line">
+            <a:avLst/>
+          </a:prstGeom>
+          <a:noFill/>
+          <a:ln w="22860" cap="round">
+            <a:solidFill>
+              <a:srgbClr val="65B000"/>
+            </a:solidFill>
+            <a:tailEnd type="triangle" w="med" len="med"/>
+          </a:ln>
+        </p:spPr>
+      </p:sp>
+      <p:sp>
+        <p:nvSpPr>
+          <p:cNvPr id="19" name="Device Lib To Runtime Connector"/>
+          <p:cNvSpPr/>
+          <p:nvPr/>
+        </p:nvSpPr>
+        <p:spPr>
+          <a:xfrm>
+            <a:off x="5669280" y="3986784"/>
+            <a:ext cx="274320" cy="0"/>
+          </a:xfrm>
+          <a:prstGeom prst="line">
+            <a:avLst/>
+          </a:prstGeom>
+          <a:noFill/>
+          <a:ln w="22860" cap="round">
+            <a:solidFill>
+              <a:srgbClr val="65B000"/>
+            </a:solidFill>
+            <a:tailEnd type="triangle" w="med" len="med"/>
+          </a:ln>
+        </p:spPr>
+      </p:sp>
       <p:sp>
         <p:nvSpPr>
           <p:cNvPr id="8" name="TextBox 7"/>
@@ -16685,7 +17307,7 @@
 </file>
 
 <file path=ppt/slides/slide41.xml><?xml version="1.0" encoding="utf-8"?>
-<p:sld xmlns:a="http://schemas.openxmlformats.org/drawingml/2006/main" xmlns:p="http://schemas.openxmlformats.org/presentationml/2006/main" xmlns:r="http://schemas.openxmlformats.org/officeDocument/2006/relationships">
+<p:sld xmlns:a="http://schemas.openxmlformats.org/drawingml/2006/main" xmlns:p="http://schemas.openxmlformats.org/presentationml/2006/main">
   <p:cSld>
     <p:bg>
       <p:bgPr>
@@ -16897,30 +17519,344 @@
           </a:p>
         </p:txBody>
       </p:sp>
-      <p:pic>
-        <p:nvPicPr>
-          <p:cNvPr id="7" name="Picture 6" descr="target_graph.png"/>
-          <p:cNvPicPr>
-            <a:picLocks noChangeAspect="1"/>
-          </p:cNvPicPr>
-          <p:nvPr/>
-        </p:nvPicPr>
-        <p:blipFill>
-          <a:blip r:embed="rId2"/>
-          <a:stretch>
-            <a:fillRect/>
-          </a:stretch>
-        </p:blipFill>
-        <p:spPr>
-          <a:xfrm>
-            <a:off x="594360" y="2101595"/>
-            <a:ext cx="6766560" cy="3157728"/>
-          </a:xfrm>
-          <a:prstGeom prst="rect">
-            <a:avLst/>
-          </a:prstGeom>
-        </p:spPr>
-      </p:pic>
+      <p:sp>
+        <p:nvSpPr>
+          <p:cNvPr id="10" name="Target Graph Diagram Title"/>
+          <p:cNvSpPr txBox="1"/>
+          <p:nvPr/>
+        </p:nvSpPr>
+        <p:spPr>
+          <a:xfrm>
+            <a:off x="786384" y="2240280"/>
+            <a:ext cx="6309360" cy="320040"/>
+          </a:xfrm>
+          <a:prstGeom prst="rect">
+            <a:avLst/>
+          </a:prstGeom>
+          <a:noFill/>
+          <a:ln/>
+        </p:spPr>
+        <p:txBody>
+          <a:bodyPr wrap="square" anchor="t" lIns="0" tIns="0" rIns="0" bIns="0">
+            <a:normAutofit/>
+          </a:bodyPr>
+          <a:lstStyle/>
+          <a:p>
+            <a:pPr algn="l"/>
+            <a:r>
+              <a:rPr sz="1200" b="1">
+                <a:solidFill>
+                  <a:srgbClr val="121B2A"/>
+                </a:solidFill>
+                <a:latin typeface="Aptos"/>
+              </a:rPr>
+              <a:t>Bazel target graph mirrors project architecture</a:t>
+            </a:r>
+          </a:p>
+        </p:txBody>
+      </p:sp>
+      <p:sp>
+        <p:nvSpPr>
+          <p:cNvPr id="11" name="Benchmark Target Node"/>
+          <p:cNvSpPr/>
+          <p:nvPr/>
+        </p:nvSpPr>
+        <p:spPr>
+          <a:xfrm>
+            <a:off x="960120" y="3200400"/>
+            <a:ext cx="1325880" cy="512064"/>
+          </a:xfrm>
+          <a:prstGeom prst="roundRect">
+            <a:avLst/>
+          </a:prstGeom>
+          <a:solidFill>
+            <a:srgbClr val="E6F6F8"/>
+          </a:solidFill>
+          <a:ln w="10160">
+            <a:solidFill>
+              <a:srgbClr val="9BA9B8"/>
+            </a:solidFill>
+          </a:ln>
+        </p:spPr>
+        <p:txBody>
+          <a:bodyPr wrap="square" anchor="ctr" lIns="91440" tIns="36576" rIns="91440" bIns="36576">
+            <a:normAutofit/>
+          </a:bodyPr>
+          <a:lstStyle/>
+          <a:p>
+            <a:pPr algn="ctr"/>
+            <a:r>
+              <a:rPr sz="950">
+                <a:solidFill>
+                  <a:srgbClr val="1C2430"/>
+                </a:solidFill>
+                <a:latin typeface="Aptos"/>
+              </a:rPr>
+              <a:t>benchmark</a:t>
+            </a:r>
+          </a:p>
+        </p:txBody>
+      </p:sp>
+      <p:sp>
+        <p:nvSpPr>
+          <p:cNvPr id="12" name="Vector CPU Target Node"/>
+          <p:cNvSpPr/>
+          <p:nvPr/>
+        </p:nvSpPr>
+        <p:spPr>
+          <a:xfrm>
+            <a:off x="2606040" y="2816352"/>
+            <a:ext cx="1417320" cy="512064"/>
+          </a:xfrm>
+          <a:prstGeom prst="roundRect">
+            <a:avLst/>
+          </a:prstGeom>
+          <a:solidFill>
+            <a:srgbClr val="E4EFFC"/>
+          </a:solidFill>
+          <a:ln w="10160">
+            <a:solidFill>
+              <a:srgbClr val="9BA9B8"/>
+            </a:solidFill>
+          </a:ln>
+        </p:spPr>
+        <p:txBody>
+          <a:bodyPr wrap="square" anchor="ctr" lIns="91440" tIns="36576" rIns="91440" bIns="36576">
+            <a:normAutofit/>
+          </a:bodyPr>
+          <a:lstStyle/>
+          <a:p>
+            <a:pPr algn="ctr"/>
+            <a:r>
+              <a:rPr sz="950">
+                <a:solidFill>
+                  <a:srgbClr val="1C2430"/>
+                </a:solidFill>
+                <a:latin typeface="Aptos"/>
+              </a:rPr>
+              <a:t>vector_cpu</a:t>
+            </a:r>
+          </a:p>
+        </p:txBody>
+      </p:sp>
+      <p:sp>
+        <p:nvSpPr>
+          <p:cNvPr id="13" name="Vector Add Target Node"/>
+          <p:cNvSpPr/>
+          <p:nvPr/>
+        </p:nvSpPr>
+        <p:spPr>
+          <a:xfrm>
+            <a:off x="2606040" y="3730752"/>
+            <a:ext cx="1417320" cy="512064"/>
+          </a:xfrm>
+          <a:prstGeom prst="roundRect">
+            <a:avLst/>
+          </a:prstGeom>
+          <a:solidFill>
+            <a:srgbClr val="EAF8E7"/>
+          </a:solidFill>
+          <a:ln w="10160">
+            <a:solidFill>
+              <a:srgbClr val="9BA9B8"/>
+            </a:solidFill>
+          </a:ln>
+        </p:spPr>
+        <p:txBody>
+          <a:bodyPr wrap="square" anchor="ctr" lIns="91440" tIns="36576" rIns="91440" bIns="36576">
+            <a:normAutofit/>
+          </a:bodyPr>
+          <a:lstStyle/>
+          <a:p>
+            <a:pPr algn="ctr"/>
+            <a:r>
+              <a:rPr sz="950">
+                <a:solidFill>
+                  <a:srgbClr val="1C2430"/>
+                </a:solidFill>
+                <a:latin typeface="Aptos"/>
+              </a:rPr>
+              <a:t>vector_add</a:t>
+            </a:r>
+          </a:p>
+        </p:txBody>
+      </p:sp>
+      <p:sp>
+        <p:nvSpPr>
+          <p:cNvPr id="14" name="Device Lib Target Node"/>
+          <p:cNvSpPr/>
+          <p:nvPr/>
+        </p:nvSpPr>
+        <p:spPr>
+          <a:xfrm>
+            <a:off x="4343400" y="3730752"/>
+            <a:ext cx="1325880" cy="512064"/>
+          </a:xfrm>
+          <a:prstGeom prst="roundRect">
+            <a:avLst/>
+          </a:prstGeom>
+          <a:solidFill>
+            <a:srgbClr val="FFF4DE"/>
+          </a:solidFill>
+          <a:ln w="10160">
+            <a:solidFill>
+              <a:srgbClr val="9BA9B8"/>
+            </a:solidFill>
+          </a:ln>
+        </p:spPr>
+        <p:txBody>
+          <a:bodyPr wrap="square" anchor="ctr" lIns="91440" tIns="36576" rIns="91440" bIns="36576">
+            <a:normAutofit/>
+          </a:bodyPr>
+          <a:lstStyle/>
+          <a:p>
+            <a:pPr algn="ctr"/>
+            <a:r>
+              <a:rPr sz="950">
+                <a:solidFill>
+                  <a:srgbClr val="1C2430"/>
+                </a:solidFill>
+                <a:latin typeface="Aptos"/>
+              </a:rPr>
+              <a:t>device_lib</a:t>
+            </a:r>
+          </a:p>
+        </p:txBody>
+      </p:sp>
+      <p:sp>
+        <p:nvSpPr>
+          <p:cNvPr id="15" name="Runtime Target Node"/>
+          <p:cNvSpPr/>
+          <p:nvPr/>
+        </p:nvSpPr>
+        <p:spPr>
+          <a:xfrm>
+            <a:off x="5943600" y="3730752"/>
+            <a:ext cx="1234440" cy="512064"/>
+          </a:xfrm>
+          <a:prstGeom prst="roundRect">
+            <a:avLst/>
+          </a:prstGeom>
+          <a:solidFill>
+            <a:srgbClr val="EAE5FF"/>
+          </a:solidFill>
+          <a:ln w="10160">
+            <a:solidFill>
+              <a:srgbClr val="9BA9B8"/>
+            </a:solidFill>
+          </a:ln>
+        </p:spPr>
+        <p:txBody>
+          <a:bodyPr wrap="square" anchor="ctr" lIns="91440" tIns="36576" rIns="91440" bIns="36576">
+            <a:normAutofit/>
+          </a:bodyPr>
+          <a:lstStyle/>
+          <a:p>
+            <a:pPr algn="ctr"/>
+            <a:r>
+              <a:rPr sz="950">
+                <a:solidFill>
+                  <a:srgbClr val="1C2430"/>
+                </a:solidFill>
+                <a:latin typeface="Aptos"/>
+              </a:rPr>
+              <a:t>runtime</a:t>
+            </a:r>
+          </a:p>
+        </p:txBody>
+      </p:sp>
+      <p:sp>
+        <p:nvSpPr>
+          <p:cNvPr id="16" name="Benchmark To Vector CPU Connector"/>
+          <p:cNvSpPr/>
+          <p:nvPr/>
+        </p:nvSpPr>
+        <p:spPr>
+          <a:xfrm flipV="1">
+            <a:off x="2286000" y="3072384"/>
+            <a:ext cx="320040" cy="384048"/>
+          </a:xfrm>
+          <a:prstGeom prst="line">
+            <a:avLst/>
+          </a:prstGeom>
+          <a:noFill/>
+          <a:ln w="22860" cap="round">
+            <a:solidFill>
+              <a:srgbClr val="65B000"/>
+            </a:solidFill>
+            <a:tailEnd type="triangle" w="med" len="med"/>
+          </a:ln>
+        </p:spPr>
+      </p:sp>
+      <p:sp>
+        <p:nvSpPr>
+          <p:cNvPr id="17" name="Benchmark To Vector Add Connector"/>
+          <p:cNvSpPr/>
+          <p:nvPr/>
+        </p:nvSpPr>
+        <p:spPr>
+          <a:xfrm>
+            <a:off x="2286000" y="3456432"/>
+            <a:ext cx="320040" cy="530352"/>
+          </a:xfrm>
+          <a:prstGeom prst="line">
+            <a:avLst/>
+          </a:prstGeom>
+          <a:noFill/>
+          <a:ln w="22860" cap="round">
+            <a:solidFill>
+              <a:srgbClr val="65B000"/>
+            </a:solidFill>
+            <a:tailEnd type="triangle" w="med" len="med"/>
+          </a:ln>
+        </p:spPr>
+      </p:sp>
+      <p:sp>
+        <p:nvSpPr>
+          <p:cNvPr id="18" name="Vector Add To Device Lib Connector"/>
+          <p:cNvSpPr/>
+          <p:nvPr/>
+        </p:nvSpPr>
+        <p:spPr>
+          <a:xfrm>
+            <a:off x="4023360" y="3986784"/>
+            <a:ext cx="320040" cy="0"/>
+          </a:xfrm>
+          <a:prstGeom prst="line">
+            <a:avLst/>
+          </a:prstGeom>
+          <a:noFill/>
+          <a:ln w="22860" cap="round">
+            <a:solidFill>
+              <a:srgbClr val="65B000"/>
+            </a:solidFill>
+            <a:tailEnd type="triangle" w="med" len="med"/>
+          </a:ln>
+        </p:spPr>
+      </p:sp>
+      <p:sp>
+        <p:nvSpPr>
+          <p:cNvPr id="19" name="Device Lib To Runtime Connector"/>
+          <p:cNvSpPr/>
+          <p:nvPr/>
+        </p:nvSpPr>
+        <p:spPr>
+          <a:xfrm>
+            <a:off x="5669280" y="3986784"/>
+            <a:ext cx="274320" cy="0"/>
+          </a:xfrm>
+          <a:prstGeom prst="line">
+            <a:avLst/>
+          </a:prstGeom>
+          <a:noFill/>
+          <a:ln w="22860" cap="round">
+            <a:solidFill>
+              <a:srgbClr val="65B000"/>
+            </a:solidFill>
+            <a:tailEnd type="triangle" w="med" len="med"/>
+          </a:ln>
+        </p:spPr>
+      </p:sp>
       <p:sp>
         <p:nvSpPr>
           <p:cNvPr id="8" name="TextBox 7"/>
@@ -20304,7 +21240,7 @@
 </file>
 
 <file path=ppt/slides/slide7.xml><?xml version="1.0" encoding="utf-8"?>
-<p:sld xmlns:a="http://schemas.openxmlformats.org/drawingml/2006/main" xmlns:p="http://schemas.openxmlformats.org/presentationml/2006/main" xmlns:r="http://schemas.openxmlformats.org/officeDocument/2006/relationships">
+<p:sld xmlns:a="http://schemas.openxmlformats.org/drawingml/2006/main" xmlns:p="http://schemas.openxmlformats.org/presentationml/2006/main">
   <p:cSld>
     <p:bg>
       <p:bgPr>
@@ -20516,30 +21452,1134 @@
           </a:p>
         </p:txBody>
       </p:sp>
-      <p:pic>
-        <p:nvPicPr>
-          <p:cNvPr id="7" name="Picture 6" descr="cpu_gpu_shape.png"/>
-          <p:cNvPicPr>
-            <a:picLocks noChangeAspect="1"/>
-          </p:cNvPicPr>
-          <p:nvPr/>
-        </p:nvPicPr>
-        <p:blipFill>
-          <a:blip r:embed="rId2"/>
-          <a:stretch>
-            <a:fillRect/>
-          </a:stretch>
-        </p:blipFill>
-        <p:spPr>
-          <a:xfrm>
-            <a:off x="594360" y="2230482"/>
-            <a:ext cx="6766560" cy="2899954"/>
-          </a:xfrm>
-          <a:prstGeom prst="rect">
-            <a:avLst/>
-          </a:prstGeom>
-        </p:spPr>
-      </p:pic>
+      <p:sp>
+        <p:nvSpPr>
+          <p:cNvPr id="10" name="Work Shape Diagram Title"/>
+          <p:cNvSpPr txBox="1"/>
+          <p:nvPr/>
+        </p:nvSpPr>
+        <p:spPr>
+          <a:xfrm>
+            <a:off x="832104" y="2386584"/>
+            <a:ext cx="6126480" cy="292608"/>
+          </a:xfrm>
+          <a:prstGeom prst="rect">
+            <a:avLst/>
+          </a:prstGeom>
+          <a:noFill/>
+          <a:ln/>
+        </p:spPr>
+        <p:txBody>
+          <a:bodyPr wrap="square" anchor="t" lIns="0" tIns="0" rIns="0" bIns="0">
+            <a:normAutofit/>
+          </a:bodyPr>
+          <a:lstStyle/>
+          <a:p>
+            <a:pPr algn="l"/>
+            <a:r>
+              <a:rPr sz="1150" b="1">
+                <a:solidFill>
+                  <a:srgbClr val="121B2A"/>
+                </a:solidFill>
+                <a:latin typeface="Aptos"/>
+              </a:rPr>
+              <a:t>Serial CPU vs CPU threads vs GPU grid</a:t>
+            </a:r>
+          </a:p>
+        </p:txBody>
+      </p:sp>
+      <p:sp>
+        <p:nvSpPr>
+          <p:cNvPr id="11" name="Editable Serial CPU Square"/>
+          <p:cNvSpPr/>
+          <p:nvPr/>
+        </p:nvSpPr>
+        <p:spPr>
+          <a:xfrm>
+            <a:off x="886968" y="2907792"/>
+            <a:ext cx="1691640" cy="1755648"/>
+          </a:xfrm>
+          <a:prstGeom prst="roundRect">
+            <a:avLst/>
+          </a:prstGeom>
+          <a:solidFill>
+            <a:srgbClr val="E7F0FF"/>
+          </a:solidFill>
+          <a:ln w="10160">
+            <a:solidFill>
+              <a:srgbClr val="2F6BFF"/>
+            </a:solidFill>
+          </a:ln>
+        </p:spPr>
+      </p:sp>
+      <p:sp>
+        <p:nvSpPr>
+          <p:cNvPr id="12" name="Editable CPU Threads Square"/>
+          <p:cNvSpPr/>
+          <p:nvPr/>
+        </p:nvSpPr>
+        <p:spPr>
+          <a:xfrm>
+            <a:off x="3154680" y="2907792"/>
+            <a:ext cx="1691640" cy="1755648"/>
+          </a:xfrm>
+          <a:prstGeom prst="roundRect">
+            <a:avLst/>
+          </a:prstGeom>
+          <a:solidFill>
+            <a:srgbClr val="FFF3DD"/>
+          </a:solidFill>
+          <a:ln w="10160">
+            <a:solidFill>
+              <a:srgbClr val="F28A2E"/>
+            </a:solidFill>
+          </a:ln>
+        </p:spPr>
+      </p:sp>
+      <p:sp>
+        <p:nvSpPr>
+          <p:cNvPr id="13" name="Editable CUDA Grid Square"/>
+          <p:cNvSpPr/>
+          <p:nvPr/>
+        </p:nvSpPr>
+        <p:spPr>
+          <a:xfrm>
+            <a:off x="5431536" y="2907792"/>
+            <a:ext cx="1691640" cy="1755648"/>
+          </a:xfrm>
+          <a:prstGeom prst="roundRect">
+            <a:avLst/>
+          </a:prstGeom>
+          <a:solidFill>
+            <a:srgbClr val="EDF9E9"/>
+          </a:solidFill>
+          <a:ln w="10160">
+            <a:solidFill>
+              <a:srgbClr val="62B000"/>
+            </a:solidFill>
+          </a:ln>
+        </p:spPr>
+      </p:sp>
+      <p:sp>
+        <p:nvSpPr>
+          <p:cNvPr id="14" name="Serial CPU Label"/>
+          <p:cNvSpPr txBox="1"/>
+          <p:nvPr/>
+        </p:nvSpPr>
+        <p:spPr>
+          <a:xfrm>
+            <a:off x="1115568" y="3474720"/>
+            <a:ext cx="1234440" cy="566928"/>
+          </a:xfrm>
+          <a:prstGeom prst="rect">
+            <a:avLst/>
+          </a:prstGeom>
+          <a:noFill/>
+          <a:ln/>
+        </p:spPr>
+        <p:txBody>
+          <a:bodyPr wrap="square" anchor="ctr" lIns="0" tIns="0" rIns="0" bIns="0">
+            <a:normAutofit/>
+          </a:bodyPr>
+          <a:lstStyle/>
+          <a:p>
+            <a:pPr algn="ctr"/>
+            <a:r>
+              <a:rPr sz="820">
+                <a:solidFill>
+                  <a:srgbClr val="121B2A"/>
+                </a:solidFill>
+                <a:latin typeface="Aptos"/>
+              </a:rPr>
+              <a:t>Serial CPU</a:t>
+            </a:r>
+          </a:p>
+          <a:p>
+            <a:pPr algn="ctr"/>
+            <a:r>
+              <a:rPr sz="820">
+                <a:solidFill>
+                  <a:srgbClr val="121B2A"/>
+                </a:solidFill>
+                <a:latin typeface="Aptos"/>
+              </a:rPr>
+              <a:t>for (i)</a:t>
+            </a:r>
+          </a:p>
+          <a:p>
+            <a:pPr algn="ctr"/>
+            <a:r>
+              <a:rPr sz="820">
+                <a:solidFill>
+                  <a:srgbClr val="121B2A"/>
+                </a:solidFill>
+                <a:latin typeface="Aptos"/>
+              </a:rPr>
+              <a:t>work(i)</a:t>
+            </a:r>
+          </a:p>
+        </p:txBody>
+      </p:sp>
+      <p:sp>
+        <p:nvSpPr>
+          <p:cNvPr id="15" name="CPU Threads Label"/>
+          <p:cNvSpPr txBox="1"/>
+          <p:nvPr/>
+        </p:nvSpPr>
+        <p:spPr>
+          <a:xfrm>
+            <a:off x="3355848" y="3218688"/>
+            <a:ext cx="1289304" cy="566928"/>
+          </a:xfrm>
+          <a:prstGeom prst="rect">
+            <a:avLst/>
+          </a:prstGeom>
+          <a:noFill/>
+          <a:ln/>
+        </p:spPr>
+        <p:txBody>
+          <a:bodyPr wrap="square" anchor="ctr" lIns="0" tIns="0" rIns="0" bIns="0">
+            <a:normAutofit/>
+          </a:bodyPr>
+          <a:lstStyle/>
+          <a:p>
+            <a:pPr algn="ctr"/>
+            <a:r>
+              <a:rPr sz="760">
+                <a:solidFill>
+                  <a:srgbClr val="121B2A"/>
+                </a:solidFill>
+                <a:latin typeface="Aptos"/>
+              </a:rPr>
+              <a:t>CPU threads</a:t>
+            </a:r>
+          </a:p>
+          <a:p>
+            <a:pPr algn="ctr"/>
+            <a:r>
+              <a:rPr sz="760">
+                <a:solidFill>
+                  <a:srgbClr val="121B2A"/>
+                </a:solidFill>
+                <a:latin typeface="Aptos"/>
+              </a:rPr>
+              <a:t>chunks of N</a:t>
+            </a:r>
+          </a:p>
+          <a:p>
+            <a:pPr algn="ctr"/>
+            <a:r>
+              <a:rPr sz="760">
+                <a:solidFill>
+                  <a:srgbClr val="121B2A"/>
+                </a:solidFill>
+                <a:latin typeface="Aptos"/>
+              </a:rPr>
+              <a:t>std::thread</a:t>
+            </a:r>
+          </a:p>
+        </p:txBody>
+      </p:sp>
+      <p:sp>
+        <p:nvSpPr>
+          <p:cNvPr id="16" name="CPU Thread Chunk 1"/>
+          <p:cNvSpPr/>
+          <p:nvPr/>
+        </p:nvSpPr>
+        <p:spPr>
+          <a:xfrm>
+            <a:off x="3447288" y="3913632"/>
+            <a:ext cx="1106424" cy="50292"/>
+          </a:xfrm>
+          <a:prstGeom prst="rect">
+            <a:avLst/>
+          </a:prstGeom>
+          <a:solidFill>
+            <a:srgbClr val="F28A2E"/>
+          </a:solidFill>
+          <a:ln w="2540">
+            <a:solidFill>
+              <a:srgbClr val="F28A2E"/>
+            </a:solidFill>
+          </a:ln>
+        </p:spPr>
+      </p:sp>
+      <p:sp>
+        <p:nvSpPr>
+          <p:cNvPr id="17" name="CPU Thread Chunk 2"/>
+          <p:cNvSpPr/>
+          <p:nvPr/>
+        </p:nvSpPr>
+        <p:spPr>
+          <a:xfrm>
+            <a:off x="3447288" y="4050792"/>
+            <a:ext cx="1106424" cy="50292"/>
+          </a:xfrm>
+          <a:prstGeom prst="rect">
+            <a:avLst/>
+          </a:prstGeom>
+          <a:solidFill>
+            <a:srgbClr val="F28A2E"/>
+          </a:solidFill>
+          <a:ln w="2540">
+            <a:solidFill>
+              <a:srgbClr val="F28A2E"/>
+            </a:solidFill>
+          </a:ln>
+        </p:spPr>
+      </p:sp>
+      <p:sp>
+        <p:nvSpPr>
+          <p:cNvPr id="18" name="CPU Thread Chunk 3"/>
+          <p:cNvSpPr/>
+          <p:nvPr/>
+        </p:nvSpPr>
+        <p:spPr>
+          <a:xfrm>
+            <a:off x="3447288" y="4187952"/>
+            <a:ext cx="1106424" cy="50292"/>
+          </a:xfrm>
+          <a:prstGeom prst="rect">
+            <a:avLst/>
+          </a:prstGeom>
+          <a:solidFill>
+            <a:srgbClr val="F28A2E"/>
+          </a:solidFill>
+          <a:ln w="2540">
+            <a:solidFill>
+              <a:srgbClr val="F28A2E"/>
+            </a:solidFill>
+          </a:ln>
+        </p:spPr>
+      </p:sp>
+      <p:sp>
+        <p:nvSpPr>
+          <p:cNvPr id="19" name="CPU Thread Chunk 4"/>
+          <p:cNvSpPr/>
+          <p:nvPr/>
+        </p:nvSpPr>
+        <p:spPr>
+          <a:xfrm>
+            <a:off x="3447288" y="4325112"/>
+            <a:ext cx="1106424" cy="50292"/>
+          </a:xfrm>
+          <a:prstGeom prst="rect">
+            <a:avLst/>
+          </a:prstGeom>
+          <a:solidFill>
+            <a:srgbClr val="F28A2E"/>
+          </a:solidFill>
+          <a:ln w="2540">
+            <a:solidFill>
+              <a:srgbClr val="F28A2E"/>
+            </a:solidFill>
+          </a:ln>
+        </p:spPr>
+      </p:sp>
+      <p:sp>
+        <p:nvSpPr>
+          <p:cNvPr id="20" name="CPU Thread Chunk 5"/>
+          <p:cNvSpPr/>
+          <p:nvPr/>
+        </p:nvSpPr>
+        <p:spPr>
+          <a:xfrm>
+            <a:off x="3447288" y="4462272"/>
+            <a:ext cx="1106424" cy="50292"/>
+          </a:xfrm>
+          <a:prstGeom prst="rect">
+            <a:avLst/>
+          </a:prstGeom>
+          <a:solidFill>
+            <a:srgbClr val="F28A2E"/>
+          </a:solidFill>
+          <a:ln w="2540">
+            <a:solidFill>
+              <a:srgbClr val="F28A2E"/>
+            </a:solidFill>
+          </a:ln>
+        </p:spPr>
+      </p:sp>
+      <p:sp>
+        <p:nvSpPr>
+          <p:cNvPr id="21" name="CPU Thread Chunk 6"/>
+          <p:cNvSpPr/>
+          <p:nvPr/>
+        </p:nvSpPr>
+        <p:spPr>
+          <a:xfrm>
+            <a:off x="3447288" y="4599432"/>
+            <a:ext cx="1106424" cy="50292"/>
+          </a:xfrm>
+          <a:prstGeom prst="rect">
+            <a:avLst/>
+          </a:prstGeom>
+          <a:solidFill>
+            <a:srgbClr val="F28A2E"/>
+          </a:solidFill>
+          <a:ln w="2540">
+            <a:solidFill>
+              <a:srgbClr val="F28A2E"/>
+            </a:solidFill>
+          </a:ln>
+        </p:spPr>
+      </p:sp>
+      <p:sp>
+        <p:nvSpPr>
+          <p:cNvPr id="22" name="CUDA Grid Label"/>
+          <p:cNvSpPr txBox="1"/>
+          <p:nvPr/>
+        </p:nvSpPr>
+        <p:spPr>
+          <a:xfrm>
+            <a:off x="5632704" y="3200400"/>
+            <a:ext cx="1289304" cy="384048"/>
+          </a:xfrm>
+          <a:prstGeom prst="rect">
+            <a:avLst/>
+          </a:prstGeom>
+          <a:noFill/>
+          <a:ln/>
+        </p:spPr>
+        <p:txBody>
+          <a:bodyPr wrap="square" anchor="ctr" lIns="0" tIns="0" rIns="0" bIns="0">
+            <a:normAutofit/>
+          </a:bodyPr>
+          <a:lstStyle/>
+          <a:p>
+            <a:pPr algn="ctr"/>
+            <a:r>
+              <a:rPr sz="760">
+                <a:solidFill>
+                  <a:srgbClr val="121B2A"/>
+                </a:solidFill>
+                <a:latin typeface="Aptos"/>
+              </a:rPr>
+              <a:t>CUDA grid</a:t>
+            </a:r>
+          </a:p>
+          <a:p>
+            <a:pPr algn="ctr"/>
+            <a:r>
+              <a:rPr sz="760">
+                <a:solidFill>
+                  <a:srgbClr val="121B2A"/>
+                </a:solidFill>
+                <a:latin typeface="Aptos"/>
+              </a:rPr>
+              <a:t>blocks x threads</a:t>
+            </a:r>
+          </a:p>
+        </p:txBody>
+      </p:sp>
+      <p:sp>
+        <p:nvSpPr>
+          <p:cNvPr id="23" name="CUDA Thread Cell 1-1"/>
+          <p:cNvSpPr/>
+          <p:nvPr/>
+        </p:nvSpPr>
+        <p:spPr>
+          <a:xfrm>
+            <a:off x="5742432" y="3712464"/>
+            <a:ext cx="96012" cy="96012"/>
+          </a:xfrm>
+          <a:prstGeom prst="rect">
+            <a:avLst/>
+          </a:prstGeom>
+          <a:solidFill>
+            <a:srgbClr val="64B900"/>
+          </a:solidFill>
+          <a:ln w="2540">
+            <a:solidFill>
+              <a:srgbClr val="64B900"/>
+            </a:solidFill>
+          </a:ln>
+        </p:spPr>
+      </p:sp>
+      <p:sp>
+        <p:nvSpPr>
+          <p:cNvPr id="24" name="CUDA Thread Cell 1-2"/>
+          <p:cNvSpPr/>
+          <p:nvPr/>
+        </p:nvSpPr>
+        <p:spPr>
+          <a:xfrm>
+            <a:off x="5907024" y="3712464"/>
+            <a:ext cx="96012" cy="96012"/>
+          </a:xfrm>
+          <a:prstGeom prst="rect">
+            <a:avLst/>
+          </a:prstGeom>
+          <a:solidFill>
+            <a:srgbClr val="64B900"/>
+          </a:solidFill>
+          <a:ln w="2540">
+            <a:solidFill>
+              <a:srgbClr val="64B900"/>
+            </a:solidFill>
+          </a:ln>
+        </p:spPr>
+      </p:sp>
+      <p:sp>
+        <p:nvSpPr>
+          <p:cNvPr id="25" name="CUDA Thread Cell 1-3"/>
+          <p:cNvSpPr/>
+          <p:nvPr/>
+        </p:nvSpPr>
+        <p:spPr>
+          <a:xfrm>
+            <a:off x="6071616" y="3712464"/>
+            <a:ext cx="96012" cy="96012"/>
+          </a:xfrm>
+          <a:prstGeom prst="rect">
+            <a:avLst/>
+          </a:prstGeom>
+          <a:solidFill>
+            <a:srgbClr val="64B900"/>
+          </a:solidFill>
+          <a:ln w="2540">
+            <a:solidFill>
+              <a:srgbClr val="64B900"/>
+            </a:solidFill>
+          </a:ln>
+        </p:spPr>
+      </p:sp>
+      <p:sp>
+        <p:nvSpPr>
+          <p:cNvPr id="26" name="CUDA Thread Cell 1-4"/>
+          <p:cNvSpPr/>
+          <p:nvPr/>
+        </p:nvSpPr>
+        <p:spPr>
+          <a:xfrm>
+            <a:off x="6236208" y="3712464"/>
+            <a:ext cx="96012" cy="96012"/>
+          </a:xfrm>
+          <a:prstGeom prst="rect">
+            <a:avLst/>
+          </a:prstGeom>
+          <a:solidFill>
+            <a:srgbClr val="64B900"/>
+          </a:solidFill>
+          <a:ln w="2540">
+            <a:solidFill>
+              <a:srgbClr val="64B900"/>
+            </a:solidFill>
+          </a:ln>
+        </p:spPr>
+      </p:sp>
+      <p:sp>
+        <p:nvSpPr>
+          <p:cNvPr id="27" name="CUDA Thread Cell 1-5"/>
+          <p:cNvSpPr/>
+          <p:nvPr/>
+        </p:nvSpPr>
+        <p:spPr>
+          <a:xfrm>
+            <a:off x="6400800" y="3712464"/>
+            <a:ext cx="96012" cy="96012"/>
+          </a:xfrm>
+          <a:prstGeom prst="rect">
+            <a:avLst/>
+          </a:prstGeom>
+          <a:solidFill>
+            <a:srgbClr val="64B900"/>
+          </a:solidFill>
+          <a:ln w="2540">
+            <a:solidFill>
+              <a:srgbClr val="64B900"/>
+            </a:solidFill>
+          </a:ln>
+        </p:spPr>
+      </p:sp>
+      <p:sp>
+        <p:nvSpPr>
+          <p:cNvPr id="28" name="CUDA Thread Cell 1-6"/>
+          <p:cNvSpPr/>
+          <p:nvPr/>
+        </p:nvSpPr>
+        <p:spPr>
+          <a:xfrm>
+            <a:off x="6565392" y="3712464"/>
+            <a:ext cx="96012" cy="96012"/>
+          </a:xfrm>
+          <a:prstGeom prst="rect">
+            <a:avLst/>
+          </a:prstGeom>
+          <a:solidFill>
+            <a:srgbClr val="64B900"/>
+          </a:solidFill>
+          <a:ln w="2540">
+            <a:solidFill>
+              <a:srgbClr val="64B900"/>
+            </a:solidFill>
+          </a:ln>
+        </p:spPr>
+      </p:sp>
+      <p:sp>
+        <p:nvSpPr>
+          <p:cNvPr id="29" name="CUDA Thread Cell 1-7"/>
+          <p:cNvSpPr/>
+          <p:nvPr/>
+        </p:nvSpPr>
+        <p:spPr>
+          <a:xfrm>
+            <a:off x="6729984" y="3712464"/>
+            <a:ext cx="96012" cy="96012"/>
+          </a:xfrm>
+          <a:prstGeom prst="rect">
+            <a:avLst/>
+          </a:prstGeom>
+          <a:solidFill>
+            <a:srgbClr val="64B900"/>
+          </a:solidFill>
+          <a:ln w="2540">
+            <a:solidFill>
+              <a:srgbClr val="64B900"/>
+            </a:solidFill>
+          </a:ln>
+        </p:spPr>
+      </p:sp>
+      <p:sp>
+        <p:nvSpPr>
+          <p:cNvPr id="30" name="CUDA Thread Cell 2-1"/>
+          <p:cNvSpPr/>
+          <p:nvPr/>
+        </p:nvSpPr>
+        <p:spPr>
+          <a:xfrm>
+            <a:off x="5742432" y="3877056"/>
+            <a:ext cx="96012" cy="96012"/>
+          </a:xfrm>
+          <a:prstGeom prst="rect">
+            <a:avLst/>
+          </a:prstGeom>
+          <a:solidFill>
+            <a:srgbClr val="64B900"/>
+          </a:solidFill>
+          <a:ln w="2540">
+            <a:solidFill>
+              <a:srgbClr val="64B900"/>
+            </a:solidFill>
+          </a:ln>
+        </p:spPr>
+      </p:sp>
+      <p:sp>
+        <p:nvSpPr>
+          <p:cNvPr id="31" name="CUDA Thread Cell 2-2"/>
+          <p:cNvSpPr/>
+          <p:nvPr/>
+        </p:nvSpPr>
+        <p:spPr>
+          <a:xfrm>
+            <a:off x="5907024" y="3877056"/>
+            <a:ext cx="96012" cy="96012"/>
+          </a:xfrm>
+          <a:prstGeom prst="rect">
+            <a:avLst/>
+          </a:prstGeom>
+          <a:solidFill>
+            <a:srgbClr val="64B900"/>
+          </a:solidFill>
+          <a:ln w="2540">
+            <a:solidFill>
+              <a:srgbClr val="64B900"/>
+            </a:solidFill>
+          </a:ln>
+        </p:spPr>
+      </p:sp>
+      <p:sp>
+        <p:nvSpPr>
+          <p:cNvPr id="32" name="CUDA Thread Cell 2-3"/>
+          <p:cNvSpPr/>
+          <p:nvPr/>
+        </p:nvSpPr>
+        <p:spPr>
+          <a:xfrm>
+            <a:off x="6071616" y="3877056"/>
+            <a:ext cx="96012" cy="96012"/>
+          </a:xfrm>
+          <a:prstGeom prst="rect">
+            <a:avLst/>
+          </a:prstGeom>
+          <a:solidFill>
+            <a:srgbClr val="64B900"/>
+          </a:solidFill>
+          <a:ln w="2540">
+            <a:solidFill>
+              <a:srgbClr val="64B900"/>
+            </a:solidFill>
+          </a:ln>
+        </p:spPr>
+      </p:sp>
+      <p:sp>
+        <p:nvSpPr>
+          <p:cNvPr id="33" name="CUDA Thread Cell 2-4"/>
+          <p:cNvSpPr/>
+          <p:nvPr/>
+        </p:nvSpPr>
+        <p:spPr>
+          <a:xfrm>
+            <a:off x="6236208" y="3877056"/>
+            <a:ext cx="96012" cy="96012"/>
+          </a:xfrm>
+          <a:prstGeom prst="rect">
+            <a:avLst/>
+          </a:prstGeom>
+          <a:solidFill>
+            <a:srgbClr val="64B900"/>
+          </a:solidFill>
+          <a:ln w="2540">
+            <a:solidFill>
+              <a:srgbClr val="64B900"/>
+            </a:solidFill>
+          </a:ln>
+        </p:spPr>
+      </p:sp>
+      <p:sp>
+        <p:nvSpPr>
+          <p:cNvPr id="34" name="CUDA Thread Cell 2-5"/>
+          <p:cNvSpPr/>
+          <p:nvPr/>
+        </p:nvSpPr>
+        <p:spPr>
+          <a:xfrm>
+            <a:off x="6400800" y="3877056"/>
+            <a:ext cx="96012" cy="96012"/>
+          </a:xfrm>
+          <a:prstGeom prst="rect">
+            <a:avLst/>
+          </a:prstGeom>
+          <a:solidFill>
+            <a:srgbClr val="64B900"/>
+          </a:solidFill>
+          <a:ln w="2540">
+            <a:solidFill>
+              <a:srgbClr val="64B900"/>
+            </a:solidFill>
+          </a:ln>
+        </p:spPr>
+      </p:sp>
+      <p:sp>
+        <p:nvSpPr>
+          <p:cNvPr id="35" name="CUDA Thread Cell 2-6"/>
+          <p:cNvSpPr/>
+          <p:nvPr/>
+        </p:nvSpPr>
+        <p:spPr>
+          <a:xfrm>
+            <a:off x="6565392" y="3877056"/>
+            <a:ext cx="96012" cy="96012"/>
+          </a:xfrm>
+          <a:prstGeom prst="rect">
+            <a:avLst/>
+          </a:prstGeom>
+          <a:solidFill>
+            <a:srgbClr val="64B900"/>
+          </a:solidFill>
+          <a:ln w="2540">
+            <a:solidFill>
+              <a:srgbClr val="64B900"/>
+            </a:solidFill>
+          </a:ln>
+        </p:spPr>
+      </p:sp>
+      <p:sp>
+        <p:nvSpPr>
+          <p:cNvPr id="36" name="CUDA Thread Cell 2-7"/>
+          <p:cNvSpPr/>
+          <p:nvPr/>
+        </p:nvSpPr>
+        <p:spPr>
+          <a:xfrm>
+            <a:off x="6729984" y="3877056"/>
+            <a:ext cx="96012" cy="96012"/>
+          </a:xfrm>
+          <a:prstGeom prst="rect">
+            <a:avLst/>
+          </a:prstGeom>
+          <a:solidFill>
+            <a:srgbClr val="64B900"/>
+          </a:solidFill>
+          <a:ln w="2540">
+            <a:solidFill>
+              <a:srgbClr val="64B900"/>
+            </a:solidFill>
+          </a:ln>
+        </p:spPr>
+      </p:sp>
+      <p:sp>
+        <p:nvSpPr>
+          <p:cNvPr id="37" name="CUDA Thread Cell 3-1"/>
+          <p:cNvSpPr/>
+          <p:nvPr/>
+        </p:nvSpPr>
+        <p:spPr>
+          <a:xfrm>
+            <a:off x="5742432" y="4041648"/>
+            <a:ext cx="96012" cy="96012"/>
+          </a:xfrm>
+          <a:prstGeom prst="rect">
+            <a:avLst/>
+          </a:prstGeom>
+          <a:solidFill>
+            <a:srgbClr val="64B900"/>
+          </a:solidFill>
+          <a:ln w="2540">
+            <a:solidFill>
+              <a:srgbClr val="64B900"/>
+            </a:solidFill>
+          </a:ln>
+        </p:spPr>
+      </p:sp>
+      <p:sp>
+        <p:nvSpPr>
+          <p:cNvPr id="38" name="CUDA Thread Cell 3-2"/>
+          <p:cNvSpPr/>
+          <p:nvPr/>
+        </p:nvSpPr>
+        <p:spPr>
+          <a:xfrm>
+            <a:off x="5907024" y="4041648"/>
+            <a:ext cx="96012" cy="96012"/>
+          </a:xfrm>
+          <a:prstGeom prst="rect">
+            <a:avLst/>
+          </a:prstGeom>
+          <a:solidFill>
+            <a:srgbClr val="64B900"/>
+          </a:solidFill>
+          <a:ln w="2540">
+            <a:solidFill>
+              <a:srgbClr val="64B900"/>
+            </a:solidFill>
+          </a:ln>
+        </p:spPr>
+      </p:sp>
+      <p:sp>
+        <p:nvSpPr>
+          <p:cNvPr id="39" name="CUDA Thread Cell 3-3"/>
+          <p:cNvSpPr/>
+          <p:nvPr/>
+        </p:nvSpPr>
+        <p:spPr>
+          <a:xfrm>
+            <a:off x="6071616" y="4041648"/>
+            <a:ext cx="96012" cy="96012"/>
+          </a:xfrm>
+          <a:prstGeom prst="rect">
+            <a:avLst/>
+          </a:prstGeom>
+          <a:solidFill>
+            <a:srgbClr val="64B900"/>
+          </a:solidFill>
+          <a:ln w="2540">
+            <a:solidFill>
+              <a:srgbClr val="64B900"/>
+            </a:solidFill>
+          </a:ln>
+        </p:spPr>
+      </p:sp>
+      <p:sp>
+        <p:nvSpPr>
+          <p:cNvPr id="40" name="CUDA Thread Cell 3-4"/>
+          <p:cNvSpPr/>
+          <p:nvPr/>
+        </p:nvSpPr>
+        <p:spPr>
+          <a:xfrm>
+            <a:off x="6236208" y="4041648"/>
+            <a:ext cx="96012" cy="96012"/>
+          </a:xfrm>
+          <a:prstGeom prst="rect">
+            <a:avLst/>
+          </a:prstGeom>
+          <a:solidFill>
+            <a:srgbClr val="64B900"/>
+          </a:solidFill>
+          <a:ln w="2540">
+            <a:solidFill>
+              <a:srgbClr val="64B900"/>
+            </a:solidFill>
+          </a:ln>
+        </p:spPr>
+      </p:sp>
+      <p:sp>
+        <p:nvSpPr>
+          <p:cNvPr id="41" name="CUDA Thread Cell 3-5"/>
+          <p:cNvSpPr/>
+          <p:nvPr/>
+        </p:nvSpPr>
+        <p:spPr>
+          <a:xfrm>
+            <a:off x="6400800" y="4041648"/>
+            <a:ext cx="96012" cy="96012"/>
+          </a:xfrm>
+          <a:prstGeom prst="rect">
+            <a:avLst/>
+          </a:prstGeom>
+          <a:solidFill>
+            <a:srgbClr val="64B900"/>
+          </a:solidFill>
+          <a:ln w="2540">
+            <a:solidFill>
+              <a:srgbClr val="64B900"/>
+            </a:solidFill>
+          </a:ln>
+        </p:spPr>
+      </p:sp>
+      <p:sp>
+        <p:nvSpPr>
+          <p:cNvPr id="42" name="CUDA Thread Cell 3-6"/>
+          <p:cNvSpPr/>
+          <p:nvPr/>
+        </p:nvSpPr>
+        <p:spPr>
+          <a:xfrm>
+            <a:off x="6565392" y="4041648"/>
+            <a:ext cx="96012" cy="96012"/>
+          </a:xfrm>
+          <a:prstGeom prst="rect">
+            <a:avLst/>
+          </a:prstGeom>
+          <a:solidFill>
+            <a:srgbClr val="64B900"/>
+          </a:solidFill>
+          <a:ln w="2540">
+            <a:solidFill>
+              <a:srgbClr val="64B900"/>
+            </a:solidFill>
+          </a:ln>
+        </p:spPr>
+      </p:sp>
+      <p:sp>
+        <p:nvSpPr>
+          <p:cNvPr id="43" name="CUDA Thread Cell 3-7"/>
+          <p:cNvSpPr/>
+          <p:nvPr/>
+        </p:nvSpPr>
+        <p:spPr>
+          <a:xfrm>
+            <a:off x="6729984" y="4041648"/>
+            <a:ext cx="96012" cy="96012"/>
+          </a:xfrm>
+          <a:prstGeom prst="rect">
+            <a:avLst/>
+          </a:prstGeom>
+          <a:solidFill>
+            <a:srgbClr val="64B900"/>
+          </a:solidFill>
+          <a:ln w="2540">
+            <a:solidFill>
+              <a:srgbClr val="64B900"/>
+            </a:solidFill>
+          </a:ln>
+        </p:spPr>
+      </p:sp>
+      <p:sp>
+        <p:nvSpPr>
+          <p:cNvPr id="44" name="CUDA Thread Cell 4-1"/>
+          <p:cNvSpPr/>
+          <p:nvPr/>
+        </p:nvSpPr>
+        <p:spPr>
+          <a:xfrm>
+            <a:off x="5742432" y="4206240"/>
+            <a:ext cx="96012" cy="96012"/>
+          </a:xfrm>
+          <a:prstGeom prst="rect">
+            <a:avLst/>
+          </a:prstGeom>
+          <a:solidFill>
+            <a:srgbClr val="64B900"/>
+          </a:solidFill>
+          <a:ln w="2540">
+            <a:solidFill>
+              <a:srgbClr val="64B900"/>
+            </a:solidFill>
+          </a:ln>
+        </p:spPr>
+      </p:sp>
+      <p:sp>
+        <p:nvSpPr>
+          <p:cNvPr id="45" name="CUDA Thread Cell 4-2"/>
+          <p:cNvSpPr/>
+          <p:nvPr/>
+        </p:nvSpPr>
+        <p:spPr>
+          <a:xfrm>
+            <a:off x="5907024" y="4206240"/>
+            <a:ext cx="96012" cy="96012"/>
+          </a:xfrm>
+          <a:prstGeom prst="rect">
+            <a:avLst/>
+          </a:prstGeom>
+          <a:solidFill>
+            <a:srgbClr val="64B900"/>
+          </a:solidFill>
+          <a:ln w="2540">
+            <a:solidFill>
+              <a:srgbClr val="64B900"/>
+            </a:solidFill>
+          </a:ln>
+        </p:spPr>
+      </p:sp>
+      <p:sp>
+        <p:nvSpPr>
+          <p:cNvPr id="46" name="CUDA Thread Cell 4-3"/>
+          <p:cNvSpPr/>
+          <p:nvPr/>
+        </p:nvSpPr>
+        <p:spPr>
+          <a:xfrm>
+            <a:off x="6071616" y="4206240"/>
+            <a:ext cx="96012" cy="96012"/>
+          </a:xfrm>
+          <a:prstGeom prst="rect">
+            <a:avLst/>
+          </a:prstGeom>
+          <a:solidFill>
+            <a:srgbClr val="64B900"/>
+          </a:solidFill>
+          <a:ln w="2540">
+            <a:solidFill>
+              <a:srgbClr val="64B900"/>
+            </a:solidFill>
+          </a:ln>
+        </p:spPr>
+      </p:sp>
+      <p:sp>
+        <p:nvSpPr>
+          <p:cNvPr id="47" name="CUDA Thread Cell 4-4"/>
+          <p:cNvSpPr/>
+          <p:nvPr/>
+        </p:nvSpPr>
+        <p:spPr>
+          <a:xfrm>
+            <a:off x="6236208" y="4206240"/>
+            <a:ext cx="96012" cy="96012"/>
+          </a:xfrm>
+          <a:prstGeom prst="rect">
+            <a:avLst/>
+          </a:prstGeom>
+          <a:solidFill>
+            <a:srgbClr val="64B900"/>
+          </a:solidFill>
+          <a:ln w="2540">
+            <a:solidFill>
+              <a:srgbClr val="64B900"/>
+            </a:solidFill>
+          </a:ln>
+        </p:spPr>
+      </p:sp>
+      <p:sp>
+        <p:nvSpPr>
+          <p:cNvPr id="48" name="CUDA Thread Cell 4-5"/>
+          <p:cNvSpPr/>
+          <p:nvPr/>
+        </p:nvSpPr>
+        <p:spPr>
+          <a:xfrm>
+            <a:off x="6400800" y="4206240"/>
+            <a:ext cx="96012" cy="96012"/>
+          </a:xfrm>
+          <a:prstGeom prst="rect">
+            <a:avLst/>
+          </a:prstGeom>
+          <a:solidFill>
+            <a:srgbClr val="64B900"/>
+          </a:solidFill>
+          <a:ln w="2540">
+            <a:solidFill>
+              <a:srgbClr val="64B900"/>
+            </a:solidFill>
+          </a:ln>
+        </p:spPr>
+      </p:sp>
+      <p:sp>
+        <p:nvSpPr>
+          <p:cNvPr id="49" name="CUDA Thread Cell 4-6"/>
+          <p:cNvSpPr/>
+          <p:nvPr/>
+        </p:nvSpPr>
+        <p:spPr>
+          <a:xfrm>
+            <a:off x="6565392" y="4206240"/>
+            <a:ext cx="96012" cy="96012"/>
+          </a:xfrm>
+          <a:prstGeom prst="rect">
+            <a:avLst/>
+          </a:prstGeom>
+          <a:solidFill>
+            <a:srgbClr val="64B900"/>
+          </a:solidFill>
+          <a:ln w="2540">
+            <a:solidFill>
+              <a:srgbClr val="64B900"/>
+            </a:solidFill>
+          </a:ln>
+        </p:spPr>
+      </p:sp>
+      <p:sp>
+        <p:nvSpPr>
+          <p:cNvPr id="50" name="CUDA Thread Cell 4-7"/>
+          <p:cNvSpPr/>
+          <p:nvPr/>
+        </p:nvSpPr>
+        <p:spPr>
+          <a:xfrm>
+            <a:off x="6729984" y="4206240"/>
+            <a:ext cx="96012" cy="96012"/>
+          </a:xfrm>
+          <a:prstGeom prst="rect">
+            <a:avLst/>
+          </a:prstGeom>
+          <a:solidFill>
+            <a:srgbClr val="64B900"/>
+          </a:solidFill>
+          <a:ln w="2540">
+            <a:solidFill>
+              <a:srgbClr val="64B900"/>
+            </a:solidFill>
+          </a:ln>
+        </p:spPr>
+      </p:sp>
+      <p:sp>
+        <p:nvSpPr>
+          <p:cNvPr id="51" name="CUDA Many Elements Label"/>
+          <p:cNvSpPr txBox="1"/>
+          <p:nvPr/>
+        </p:nvSpPr>
+        <p:spPr>
+          <a:xfrm>
+            <a:off x="5751576" y="4352544"/>
+            <a:ext cx="1051560" cy="201168"/>
+          </a:xfrm>
+          <a:prstGeom prst="rect">
+            <a:avLst/>
+          </a:prstGeom>
+          <a:noFill/>
+          <a:ln/>
+        </p:spPr>
+        <p:txBody>
+          <a:bodyPr wrap="square" anchor="ctr" lIns="0" tIns="0" rIns="0" bIns="0">
+            <a:normAutofit/>
+          </a:bodyPr>
+          <a:lstStyle/>
+          <a:p>
+            <a:pPr algn="ctr"/>
+            <a:r>
+              <a:rPr sz="650">
+                <a:solidFill>
+                  <a:srgbClr val="121B2A"/>
+                </a:solidFill>
+                <a:latin typeface="Aptos"/>
+              </a:rPr>
+              <a:t>many elements</a:t>
+            </a:r>
+          </a:p>
+        </p:txBody>
+      </p:sp>
       <p:sp>
         <p:nvSpPr>
           <p:cNvPr id="8" name="TextBox 7"/>
